--- a/docs/quickguides/pkw/pptx/I1_Quick_Guide_oneSCM_Praxisbeispiele_entlang_des_Vertragsprozesses_Pkw.pptx
+++ b/docs/quickguides/pkw/pptx/I1_Quick_Guide_oneSCM_Praxisbeispiele_entlang_des_Vertragsprozesses_Pkw.pptx
@@ -3239,18 +3239,18 @@
                 <a:ea typeface="MB Corpo S Text Office" pitchFamily="34" charset="-122"/>
                 <a:cs typeface="MB Corpo S Text Office" pitchFamily="34" charset="-120"/>
               </a:rPr>
-              <a:t>Welches Beispiel passt für Van-Händler?</a:t>
-            </a:r>
-            <a:r>
-              <a:rPr lang="en-US" sz="900" dirty="0">
-                <a:solidFill>
-                  <a:srgbClr val="262626"/>
-                </a:solidFill>
-                <a:latin typeface="MB Corpo S Text Office" pitchFamily="34" charset="0"/>
-                <a:ea typeface="MB Corpo S Text Office" pitchFamily="34" charset="-122"/>
-                <a:cs typeface="MB Corpo S Text Office" pitchFamily="34" charset="-120"/>
-              </a:rPr>
-              <a:t> Beispiel 1 (gewerblicher Kunde) und Beispiel 2 (Privatkunde), beide mit Van-Kennungen.</a:t>
+              <a:t>Welches Beispiel passt für Pkw-Händler?</a:t>
+            </a:r>
+            <a:r>
+              <a:rPr lang="en-US" sz="900" dirty="0">
+                <a:solidFill>
+                  <a:srgbClr val="262626"/>
+                </a:solidFill>
+                <a:latin typeface="MB Corpo S Text Office" pitchFamily="34" charset="0"/>
+                <a:ea typeface="MB Corpo S Text Office" pitchFamily="34" charset="-122"/>
+                <a:cs typeface="MB Corpo S Text Office" pitchFamily="34" charset="-120"/>
+              </a:rPr>
+              <a:t> Beispiel 1 (gewerblicher Kunde) und Beispiel 2 (Privatkunde), beide mit Pkw-Kennungen.</a:t>
             </a:r>
             <a:endParaRPr lang="en-US" sz="900" dirty="0"/>
           </a:p>

--- a/docs/quickguides/pkw/pptx/I1_Quick_Guide_oneSCM_Praxisbeispiele_entlang_des_Vertragsprozesses_Pkw.pptx
+++ b/docs/quickguides/pkw/pptx/I1_Quick_Guide_oneSCM_Praxisbeispiele_entlang_des_Vertragsprozesses_Pkw.pptx
@@ -1481,7 +1481,7 @@
                 <a:ea typeface="MB Corpo S Text Office" pitchFamily="34" charset="-122"/>
                 <a:cs typeface="MB Corpo S Text Office" pitchFamily="34" charset="-120"/>
               </a:rPr>
-              <a:t>Dieses Dokument ist interaktiv – Verweise auf Handbuchkapitel und Systeme sind als Links hinterlegt.</a:t>
+              <a:t>Verweise auf Handbuchkapitel und Systeme sind hervorgehoben; E-Mail-Adressen sind als Links hinterlegt.</a:t>
             </a:r>
             <a:endParaRPr lang="en-US" sz="900" dirty="0"/>
           </a:p>
